--- a/chapter4/parts/part-06-quality-control/clip.pptx
+++ b/chapter4/parts/part-06-quality-control/clip.pptx
@@ -4384,7 +4384,7 @@
               </a:defRPr>
             </a:pPr>
             <a:r>
-              <a:t>Chapter 4 — 06 Quality Control</a:t>
+              <a:t>Chapter 4 — Quality Control</a:t>
             </a:r>
           </a:p>
         </p:txBody>
@@ -4563,7 +4563,7 @@
               </a:defRPr>
             </a:pPr>
             <a:r>
-              <a:t>Chapter 4 — 06 Quality Control</a:t>
+              <a:t>Chapter 4 — Quality Control</a:t>
             </a:r>
           </a:p>
         </p:txBody>
@@ -4742,7 +4742,7 @@
               </a:defRPr>
             </a:pPr>
             <a:r>
-              <a:t>Chapter 4 — 06 Quality Control</a:t>
+              <a:t>Chapter 4 — Quality Control</a:t>
             </a:r>
           </a:p>
         </p:txBody>
@@ -4901,7 +4901,7 @@
               </a:defRPr>
             </a:pPr>
             <a:r>
-              <a:t>Chapter 4 — 06 Quality Control</a:t>
+              <a:t>Chapter 4 — Quality Control</a:t>
             </a:r>
           </a:p>
         </p:txBody>
@@ -5060,7 +5060,7 @@
               </a:defRPr>
             </a:pPr>
             <a:r>
-              <a:t>Chapter 4 — 06 Quality Control</a:t>
+              <a:t>Chapter 4 — Quality Control</a:t>
             </a:r>
           </a:p>
         </p:txBody>
@@ -5259,7 +5259,7 @@
               </a:defRPr>
             </a:pPr>
             <a:r>
-              <a:t>Chapter 4 — 06 Quality Control</a:t>
+              <a:t>Chapter 4 — Quality Control</a:t>
             </a:r>
           </a:p>
         </p:txBody>
@@ -5418,7 +5418,7 @@
               </a:defRPr>
             </a:pPr>
             <a:r>
-              <a:t>Chapter 4 — 06 Quality Control</a:t>
+              <a:t>Chapter 4 — Quality Control</a:t>
             </a:r>
           </a:p>
         </p:txBody>
@@ -5657,7 +5657,7 @@
               </a:defRPr>
             </a:pPr>
             <a:r>
-              <a:t>Chapter 4 — 06 Quality Control</a:t>
+              <a:t>Chapter 4 — Quality Control</a:t>
             </a:r>
           </a:p>
         </p:txBody>
@@ -5896,7 +5896,7 @@
               </a:defRPr>
             </a:pPr>
             <a:r>
-              <a:t>Chapter 4 — 06 Quality Control</a:t>
+              <a:t>Chapter 4 — Quality Control</a:t>
             </a:r>
           </a:p>
         </p:txBody>
@@ -6135,7 +6135,7 @@
               </a:defRPr>
             </a:pPr>
             <a:r>
-              <a:t>Chapter 4 — 06 Quality Control</a:t>
+              <a:t>Chapter 4 — Quality Control</a:t>
             </a:r>
           </a:p>
         </p:txBody>
@@ -6294,7 +6294,7 @@
               </a:defRPr>
             </a:pPr>
             <a:r>
-              <a:t>Chapter 4 — 06 Quality Control</a:t>
+              <a:t>Chapter 4 — Quality Control</a:t>
             </a:r>
           </a:p>
         </p:txBody>
@@ -6533,7 +6533,7 @@
               </a:defRPr>
             </a:pPr>
             <a:r>
-              <a:t>Chapter 4 — 06 Quality Control</a:t>
+              <a:t>Chapter 4 — Quality Control</a:t>
             </a:r>
           </a:p>
         </p:txBody>

--- a/chapter4/parts/part-06-quality-control/clip.pptx
+++ b/chapter4/parts/part-06-quality-control/clip.pptx
@@ -4468,10 +4468,12 @@
           </a:bodyPr>
           <a:lstStyle/>
           <a:p>
-            <a:pPr>
+            <a:pPr lvl="0" marL="457200" indent="-228600">
+              <a:buFont typeface="Calibri"/>
               <a:spcAft>
                 <a:spcPts val="1000"/>
               </a:spcAft>
+              <a:buSzPct val="100000"/>
               <a:buChar char="•"/>
               <a:lnSpc>
                 <a:spcPts val="2200"/>
@@ -4488,10 +4490,12 @@
             </a:r>
           </a:p>
           <a:p>
-            <a:pPr>
+            <a:pPr lvl="0" marL="457200" indent="-228600">
+              <a:buFont typeface="Calibri"/>
               <a:spcAft>
                 <a:spcPts val="1000"/>
               </a:spcAft>
+              <a:buSzPct val="100000"/>
               <a:buChar char="•"/>
               <a:lnSpc>
                 <a:spcPts val="2200"/>
@@ -4508,10 +4512,12 @@
             </a:r>
           </a:p>
           <a:p>
-            <a:pPr>
+            <a:pPr lvl="0" marL="457200" indent="-228600">
+              <a:buFont typeface="Calibri"/>
               <a:spcAft>
                 <a:spcPts val="1000"/>
               </a:spcAft>
+              <a:buSzPct val="100000"/>
               <a:buChar char="•"/>
               <a:lnSpc>
                 <a:spcPts val="2200"/>
@@ -4647,10 +4653,12 @@
           </a:bodyPr>
           <a:lstStyle/>
           <a:p>
-            <a:pPr>
+            <a:pPr lvl="0" marL="457200" indent="-228600">
+              <a:buFont typeface="Calibri"/>
               <a:spcAft>
                 <a:spcPts val="1000"/>
               </a:spcAft>
+              <a:buSzPct val="100000"/>
               <a:buChar char="•"/>
               <a:lnSpc>
                 <a:spcPts val="2200"/>
@@ -4667,10 +4675,12 @@
             </a:r>
           </a:p>
           <a:p>
-            <a:pPr>
+            <a:pPr lvl="0" marL="457200" indent="-228600">
+              <a:buFont typeface="Calibri"/>
               <a:spcAft>
                 <a:spcPts val="1000"/>
               </a:spcAft>
+              <a:buSzPct val="100000"/>
               <a:buChar char="•"/>
               <a:lnSpc>
                 <a:spcPts val="2200"/>
@@ -4687,10 +4697,12 @@
             </a:r>
           </a:p>
           <a:p>
-            <a:pPr>
+            <a:pPr lvl="0" marL="457200" indent="-228600">
+              <a:buFont typeface="Calibri"/>
               <a:spcAft>
                 <a:spcPts val="1000"/>
               </a:spcAft>
+              <a:buSzPct val="100000"/>
               <a:buChar char="•"/>
               <a:lnSpc>
                 <a:spcPts val="2200"/>
@@ -4826,10 +4838,12 @@
           </a:bodyPr>
           <a:lstStyle/>
           <a:p>
-            <a:pPr>
+            <a:pPr lvl="0" marL="457200" indent="-228600">
+              <a:buFont typeface="Calibri"/>
               <a:spcAft>
                 <a:spcPts val="1000"/>
               </a:spcAft>
+              <a:buSzPct val="100000"/>
               <a:buChar char="•"/>
               <a:lnSpc>
                 <a:spcPts val="2200"/>
@@ -4846,10 +4860,12 @@
             </a:r>
           </a:p>
           <a:p>
-            <a:pPr>
+            <a:pPr lvl="0" marL="457200" indent="-228600">
+              <a:buFont typeface="Calibri"/>
               <a:spcAft>
                 <a:spcPts val="1000"/>
               </a:spcAft>
+              <a:buSzPct val="100000"/>
               <a:buChar char="•"/>
               <a:lnSpc>
                 <a:spcPts val="2200"/>
@@ -4985,10 +5001,12 @@
           </a:bodyPr>
           <a:lstStyle/>
           <a:p>
-            <a:pPr>
+            <a:pPr lvl="0" marL="457200" indent="-228600">
+              <a:buFont typeface="Calibri"/>
               <a:spcAft>
                 <a:spcPts val="1000"/>
               </a:spcAft>
+              <a:buSzPct val="100000"/>
               <a:buChar char="•"/>
               <a:lnSpc>
                 <a:spcPts val="2200"/>
@@ -5005,10 +5023,12 @@
             </a:r>
           </a:p>
           <a:p>
-            <a:pPr>
+            <a:pPr lvl="0" marL="457200" indent="-228600">
+              <a:buFont typeface="Calibri"/>
               <a:spcAft>
                 <a:spcPts val="1000"/>
               </a:spcAft>
+              <a:buSzPct val="100000"/>
               <a:buChar char="•"/>
               <a:lnSpc>
                 <a:spcPts val="2200"/>
@@ -5144,10 +5164,12 @@
           </a:bodyPr>
           <a:lstStyle/>
           <a:p>
-            <a:pPr>
+            <a:pPr lvl="0" marL="457200" indent="-228600">
+              <a:buFont typeface="Calibri"/>
               <a:spcAft>
                 <a:spcPts val="1000"/>
               </a:spcAft>
+              <a:buSzPct val="100000"/>
               <a:buChar char="•"/>
               <a:lnSpc>
                 <a:spcPts val="2200"/>
@@ -5164,10 +5186,12 @@
             </a:r>
           </a:p>
           <a:p>
-            <a:pPr>
+            <a:pPr lvl="0" marL="457200" indent="-228600">
+              <a:buFont typeface="Calibri"/>
               <a:spcAft>
                 <a:spcPts val="1000"/>
               </a:spcAft>
+              <a:buSzPct val="100000"/>
               <a:buChar char="•"/>
               <a:lnSpc>
                 <a:spcPts val="2200"/>
@@ -5184,10 +5208,12 @@
             </a:r>
           </a:p>
           <a:p>
-            <a:pPr>
+            <a:pPr lvl="0" marL="457200" indent="-228600">
+              <a:buFont typeface="Calibri"/>
               <a:spcAft>
                 <a:spcPts val="1000"/>
               </a:spcAft>
+              <a:buSzPct val="100000"/>
               <a:buChar char="•"/>
               <a:lnSpc>
                 <a:spcPts val="2200"/>
@@ -5204,10 +5230,12 @@
             </a:r>
           </a:p>
           <a:p>
-            <a:pPr>
+            <a:pPr lvl="0" marL="457200" indent="-228600">
+              <a:buFont typeface="Calibri"/>
               <a:spcAft>
                 <a:spcPts val="1000"/>
               </a:spcAft>
+              <a:buSzPct val="100000"/>
               <a:buChar char="•"/>
               <a:lnSpc>
                 <a:spcPts val="2200"/>
@@ -5343,10 +5371,12 @@
           </a:bodyPr>
           <a:lstStyle/>
           <a:p>
-            <a:pPr>
+            <a:pPr lvl="0" marL="457200" indent="-228600">
+              <a:buFont typeface="Calibri"/>
               <a:spcAft>
                 <a:spcPts val="1000"/>
               </a:spcAft>
+              <a:buSzPct val="100000"/>
               <a:buChar char="•"/>
               <a:lnSpc>
                 <a:spcPts val="2200"/>
@@ -5363,10 +5393,12 @@
             </a:r>
           </a:p>
           <a:p>
-            <a:pPr>
+            <a:pPr lvl="0" marL="457200" indent="-228600">
+              <a:buFont typeface="Calibri"/>
               <a:spcAft>
                 <a:spcPts val="1000"/>
               </a:spcAft>
+              <a:buSzPct val="100000"/>
               <a:buChar char="•"/>
               <a:lnSpc>
                 <a:spcPts val="2200"/>
@@ -5502,10 +5534,12 @@
           </a:bodyPr>
           <a:lstStyle/>
           <a:p>
-            <a:pPr>
+            <a:pPr lvl="0" marL="457200" indent="-228600">
+              <a:buFont typeface="Calibri"/>
               <a:spcAft>
                 <a:spcPts val="1000"/>
               </a:spcAft>
+              <a:buSzPct val="100000"/>
               <a:buChar char="•"/>
               <a:lnSpc>
                 <a:spcPts val="2200"/>
@@ -5522,10 +5556,12 @@
             </a:r>
           </a:p>
           <a:p>
-            <a:pPr>
+            <a:pPr lvl="0" marL="457200" indent="-228600">
+              <a:buFont typeface="Calibri"/>
               <a:spcAft>
                 <a:spcPts val="1000"/>
               </a:spcAft>
+              <a:buSzPct val="100000"/>
               <a:buChar char="•"/>
               <a:lnSpc>
                 <a:spcPts val="2200"/>
@@ -5542,10 +5578,12 @@
             </a:r>
           </a:p>
           <a:p>
-            <a:pPr>
+            <a:pPr lvl="0" marL="457200" indent="-228600">
+              <a:buFont typeface="Calibri"/>
               <a:spcAft>
                 <a:spcPts val="1000"/>
               </a:spcAft>
+              <a:buSzPct val="100000"/>
               <a:buChar char="•"/>
               <a:lnSpc>
                 <a:spcPts val="2200"/>
@@ -5562,10 +5600,12 @@
             </a:r>
           </a:p>
           <a:p>
-            <a:pPr>
+            <a:pPr lvl="0" marL="457200" indent="-228600">
+              <a:buFont typeface="Calibri"/>
               <a:spcAft>
                 <a:spcPts val="1000"/>
               </a:spcAft>
+              <a:buSzPct val="100000"/>
               <a:buChar char="•"/>
               <a:lnSpc>
                 <a:spcPts val="2200"/>
@@ -5582,10 +5622,12 @@
             </a:r>
           </a:p>
           <a:p>
-            <a:pPr>
+            <a:pPr lvl="0" marL="457200" indent="-228600">
+              <a:buFont typeface="Calibri"/>
               <a:spcAft>
                 <a:spcPts val="1000"/>
               </a:spcAft>
+              <a:buSzPct val="100000"/>
               <a:buChar char="•"/>
               <a:lnSpc>
                 <a:spcPts val="2200"/>
@@ -5602,10 +5644,12 @@
             </a:r>
           </a:p>
           <a:p>
-            <a:pPr>
+            <a:pPr lvl="0" marL="457200" indent="-228600">
+              <a:buFont typeface="Calibri"/>
               <a:spcAft>
                 <a:spcPts val="1000"/>
               </a:spcAft>
+              <a:buSzPct val="100000"/>
               <a:buChar char="•"/>
               <a:lnSpc>
                 <a:spcPts val="2200"/>
@@ -5741,10 +5785,12 @@
           </a:bodyPr>
           <a:lstStyle/>
           <a:p>
-            <a:pPr>
+            <a:pPr lvl="0" marL="457200" indent="-228600">
+              <a:buFont typeface="Calibri"/>
               <a:spcAft>
                 <a:spcPts val="1000"/>
               </a:spcAft>
+              <a:buSzPct val="100000"/>
               <a:buChar char="•"/>
               <a:lnSpc>
                 <a:spcPts val="2200"/>
@@ -5761,10 +5807,12 @@
             </a:r>
           </a:p>
           <a:p>
-            <a:pPr>
+            <a:pPr lvl="0" marL="457200" indent="-228600">
+              <a:buFont typeface="Calibri"/>
               <a:spcAft>
                 <a:spcPts val="1000"/>
               </a:spcAft>
+              <a:buSzPct val="100000"/>
               <a:buChar char="•"/>
               <a:lnSpc>
                 <a:spcPts val="2200"/>
@@ -5781,10 +5829,12 @@
             </a:r>
           </a:p>
           <a:p>
-            <a:pPr>
+            <a:pPr lvl="0" marL="457200" indent="-228600">
+              <a:buFont typeface="Calibri"/>
               <a:spcAft>
                 <a:spcPts val="1000"/>
               </a:spcAft>
+              <a:buSzPct val="100000"/>
               <a:buChar char="•"/>
               <a:lnSpc>
                 <a:spcPts val="2200"/>
@@ -5801,10 +5851,12 @@
             </a:r>
           </a:p>
           <a:p>
-            <a:pPr>
+            <a:pPr lvl="0" marL="457200" indent="-228600">
+              <a:buFont typeface="Calibri"/>
               <a:spcAft>
                 <a:spcPts val="1000"/>
               </a:spcAft>
+              <a:buSzPct val="100000"/>
               <a:buChar char="•"/>
               <a:lnSpc>
                 <a:spcPts val="2200"/>
@@ -5821,10 +5873,12 @@
             </a:r>
           </a:p>
           <a:p>
-            <a:pPr>
+            <a:pPr lvl="0" marL="457200" indent="-228600">
+              <a:buFont typeface="Calibri"/>
               <a:spcAft>
                 <a:spcPts val="1000"/>
               </a:spcAft>
+              <a:buSzPct val="100000"/>
               <a:buChar char="•"/>
               <a:lnSpc>
                 <a:spcPts val="2200"/>
@@ -5841,10 +5895,12 @@
             </a:r>
           </a:p>
           <a:p>
-            <a:pPr>
+            <a:pPr lvl="0" marL="457200" indent="-228600">
+              <a:buFont typeface="Calibri"/>
               <a:spcAft>
                 <a:spcPts val="1000"/>
               </a:spcAft>
+              <a:buSzPct val="100000"/>
               <a:buChar char="•"/>
               <a:lnSpc>
                 <a:spcPts val="2200"/>
@@ -5980,10 +6036,12 @@
           </a:bodyPr>
           <a:lstStyle/>
           <a:p>
-            <a:pPr>
+            <a:pPr lvl="0" marL="457200" indent="-228600">
+              <a:buFont typeface="Calibri"/>
               <a:spcAft>
                 <a:spcPts val="1000"/>
               </a:spcAft>
+              <a:buSzPct val="100000"/>
               <a:buChar char="•"/>
               <a:lnSpc>
                 <a:spcPts val="2200"/>
@@ -6000,10 +6058,12 @@
             </a:r>
           </a:p>
           <a:p>
-            <a:pPr>
+            <a:pPr lvl="0" marL="457200" indent="-228600">
+              <a:buFont typeface="Calibri"/>
               <a:spcAft>
                 <a:spcPts val="1000"/>
               </a:spcAft>
+              <a:buSzPct val="100000"/>
               <a:buChar char="•"/>
               <a:lnSpc>
                 <a:spcPts val="2200"/>
@@ -6020,10 +6080,12 @@
             </a:r>
           </a:p>
           <a:p>
-            <a:pPr>
+            <a:pPr lvl="0" marL="457200" indent="-228600">
+              <a:buFont typeface="Calibri"/>
               <a:spcAft>
                 <a:spcPts val="1000"/>
               </a:spcAft>
+              <a:buSzPct val="100000"/>
               <a:buChar char="•"/>
               <a:lnSpc>
                 <a:spcPts val="2200"/>
@@ -6040,10 +6102,12 @@
             </a:r>
           </a:p>
           <a:p>
-            <a:pPr>
+            <a:pPr lvl="0" marL="457200" indent="-228600">
+              <a:buFont typeface="Calibri"/>
               <a:spcAft>
                 <a:spcPts val="1000"/>
               </a:spcAft>
+              <a:buSzPct val="100000"/>
               <a:buChar char="•"/>
               <a:lnSpc>
                 <a:spcPts val="2200"/>
@@ -6060,10 +6124,12 @@
             </a:r>
           </a:p>
           <a:p>
-            <a:pPr>
+            <a:pPr lvl="0" marL="457200" indent="-228600">
+              <a:buFont typeface="Calibri"/>
               <a:spcAft>
                 <a:spcPts val="1000"/>
               </a:spcAft>
+              <a:buSzPct val="100000"/>
               <a:buChar char="•"/>
               <a:lnSpc>
                 <a:spcPts val="2200"/>
@@ -6080,10 +6146,12 @@
             </a:r>
           </a:p>
           <a:p>
-            <a:pPr>
+            <a:pPr lvl="0" marL="457200" indent="-228600">
+              <a:buFont typeface="Calibri"/>
               <a:spcAft>
                 <a:spcPts val="1000"/>
               </a:spcAft>
+              <a:buSzPct val="100000"/>
               <a:buChar char="•"/>
               <a:lnSpc>
                 <a:spcPts val="2200"/>
@@ -6219,10 +6287,12 @@
           </a:bodyPr>
           <a:lstStyle/>
           <a:p>
-            <a:pPr>
+            <a:pPr lvl="0" marL="457200" indent="-228600">
+              <a:buFont typeface="Calibri"/>
               <a:spcAft>
                 <a:spcPts val="1000"/>
               </a:spcAft>
+              <a:buSzPct val="100000"/>
               <a:buChar char="•"/>
               <a:lnSpc>
                 <a:spcPts val="2200"/>
@@ -6239,10 +6309,12 @@
             </a:r>
           </a:p>
           <a:p>
-            <a:pPr>
+            <a:pPr lvl="0" marL="457200" indent="-228600">
+              <a:buFont typeface="Calibri"/>
               <a:spcAft>
                 <a:spcPts val="1000"/>
               </a:spcAft>
+              <a:buSzPct val="100000"/>
               <a:buChar char="•"/>
               <a:lnSpc>
                 <a:spcPts val="2200"/>
@@ -6378,10 +6450,12 @@
           </a:bodyPr>
           <a:lstStyle/>
           <a:p>
-            <a:pPr>
+            <a:pPr lvl="0" marL="457200" indent="-228600">
+              <a:buFont typeface="Calibri"/>
               <a:spcAft>
                 <a:spcPts val="1000"/>
               </a:spcAft>
+              <a:buSzPct val="100000"/>
               <a:buChar char="•"/>
               <a:lnSpc>
                 <a:spcPts val="2200"/>
@@ -6398,10 +6472,12 @@
             </a:r>
           </a:p>
           <a:p>
-            <a:pPr>
+            <a:pPr lvl="0" marL="457200" indent="-228600">
+              <a:buFont typeface="Calibri"/>
               <a:spcAft>
                 <a:spcPts val="1000"/>
               </a:spcAft>
+              <a:buSzPct val="100000"/>
               <a:buChar char="•"/>
               <a:lnSpc>
                 <a:spcPts val="2200"/>
@@ -6418,10 +6494,12 @@
             </a:r>
           </a:p>
           <a:p>
-            <a:pPr>
+            <a:pPr lvl="0" marL="457200" indent="-228600">
+              <a:buFont typeface="Calibri"/>
               <a:spcAft>
                 <a:spcPts val="1000"/>
               </a:spcAft>
+              <a:buSzPct val="100000"/>
               <a:buChar char="•"/>
               <a:lnSpc>
                 <a:spcPts val="2200"/>
@@ -6438,10 +6516,12 @@
             </a:r>
           </a:p>
           <a:p>
-            <a:pPr>
+            <a:pPr lvl="0" marL="457200" indent="-228600">
+              <a:buFont typeface="Calibri"/>
               <a:spcAft>
                 <a:spcPts val="1000"/>
               </a:spcAft>
+              <a:buSzPct val="100000"/>
               <a:buChar char="•"/>
               <a:lnSpc>
                 <a:spcPts val="2200"/>
@@ -6458,10 +6538,12 @@
             </a:r>
           </a:p>
           <a:p>
-            <a:pPr>
+            <a:pPr lvl="0" marL="457200" indent="-228600">
+              <a:buFont typeface="Calibri"/>
               <a:spcAft>
                 <a:spcPts val="1000"/>
               </a:spcAft>
+              <a:buSzPct val="100000"/>
               <a:buChar char="•"/>
               <a:lnSpc>
                 <a:spcPts val="2200"/>
@@ -6478,10 +6560,12 @@
             </a:r>
           </a:p>
           <a:p>
-            <a:pPr>
+            <a:pPr lvl="0" marL="457200" indent="-228600">
+              <a:buFont typeface="Calibri"/>
               <a:spcAft>
                 <a:spcPts val="1000"/>
               </a:spcAft>
+              <a:buSzPct val="100000"/>
               <a:buChar char="•"/>
               <a:lnSpc>
                 <a:spcPts val="2200"/>
